--- a/Projects/Module05a-TheInterceptionSeam/Module05a - Giving the Agent Read Access - The Interception Seam.pptx
+++ b/Projects/Module05a-TheInterceptionSeam/Module05a - Giving the Agent Read Access - The Interception Seam.pptx
@@ -1731,7 +1731,7 @@
                 <a:ea typeface="Courier New" pitchFamily="34" charset="-122"/>
                 <a:cs typeface="Courier New" pitchFamily="34" charset="-120"/>
               </a:rPr>
-              <a:t>One new package, in MiniCode.Tools: Microsoft.Extensions.AI 10.9.0 — AIFunctionFactory, AIFunction, AITool, DelegatingAIFunction. Tool definitions are the Tools project’s job.</a:t>
+              <a:t>One new package, in MiniCode.Tools: Microsoft.Extensions.AI 10.10.0 — AIFunctionFactory, AIFunction, AITool, DelegatingAIFunction. Tool definitions are the Tools project’s job.</a:t>
             </a:r>
             <a:endParaRPr lang="en-US" sz="950" dirty="0"/>
           </a:p>
